--- a/lect/CH-05-Content.pptx
+++ b/lect/CH-05-Content.pptx
@@ -4885,8 +4885,8 @@
         </p:blipFill>
         <p:spPr>
           <a:xfrm>
-            <a:off x="3248121" y="3169920"/>
-            <a:ext cx="5695452" cy="3840480"/>
+            <a:off x="3654939" y="3169920"/>
+            <a:ext cx="4881816" cy="3291840"/>
           </a:xfrm>
           <a:prstGeom prst="rect">
             <a:avLst/>
@@ -5230,8 +5230,8 @@
         </p:blipFill>
         <p:spPr>
           <a:xfrm>
-            <a:off x="3162243" y="3347720"/>
-            <a:ext cx="5867209" cy="3840480"/>
+            <a:off x="3581329" y="3347720"/>
+            <a:ext cx="5029036" cy="3291840"/>
           </a:xfrm>
           <a:prstGeom prst="rect">
             <a:avLst/>
@@ -11280,8 +11280,8 @@
         </p:blipFill>
         <p:spPr>
           <a:xfrm>
-            <a:off x="3210334" y="4236720"/>
-            <a:ext cx="5771025" cy="3840480"/>
+            <a:off x="3622550" y="4236720"/>
+            <a:ext cx="4946593" cy="3291840"/>
           </a:xfrm>
           <a:prstGeom prst="rect">
             <a:avLst/>
@@ -11572,8 +11572,8 @@
         </p:blipFill>
         <p:spPr>
           <a:xfrm>
-            <a:off x="4271769" y="3347720"/>
-            <a:ext cx="3648155" cy="3840480"/>
+            <a:off x="4532352" y="3347720"/>
+            <a:ext cx="3126990" cy="3291840"/>
           </a:xfrm>
           <a:prstGeom prst="rect">
             <a:avLst/>
